--- a/classes/parte-7-red-team-y-operaciones-ofensivas/179-reporte-y-metricas-de-red-team/clase-179-presentacion.pptx
+++ b/classes/parte-7-red-team-y-operaciones-ofensivas/179-reporte-y-metricas-de-red-team/clase-179-presentacion.pptx
@@ -17,6 +17,9 @@
     <p:sldId id="265" r:id="rId16"/>
     <p:sldId id="266" r:id="rId17"/>
     <p:sldId id="267" r:id="rId18"/>
+    <p:sldId id="268" r:id="rId19"/>
+    <p:sldId id="269" r:id="rId20"/>
+    <p:sldId id="270" r:id="rId21"/>
   </p:sldIdLst>
   <p:sldSz cx="9144000" cy="6858000" type="screen4x3"/>
   <p:notesSz cx="6858000" cy="9144000"/>
@@ -3198,7 +3201,7 @@
                   <a:srgbClr val="0B3D2E"/>
                 </a:solidFill>
               </a:rPr>
-              <a:t>⚠️ Errores comunes</a:t>
+              <a:t>✍️ Ejercicios</a:t>
             </a:r>
           </a:p>
         </p:txBody>
@@ -3236,67 +3239,82 @@
                   <a:srgbClr val="22282E"/>
                 </a:solidFill>
               </a:rPr>
-              <a:t>•  Resumen lleno de jerga — La dirección no lo entiende; reescribe en lenguaje de negocio</a:t>
-            </a:r>
-          </a:p>
-          <a:p>
-            <a:pPr>
-              <a:spcAft>
-                <a:spcPts val="600"/>
-              </a:spcAft>
-            </a:pPr>
-            <a:r>
-              <a:rPr sz="1500">
-                <a:solidFill>
-                  <a:srgbClr val="22282E"/>
-                </a:solidFill>
-              </a:rPr>
-              <a:t>•  Hallazgos no reproducibles — Faltan evidencias/pasos; usa el cuaderno con timestamps</a:t>
-            </a:r>
-          </a:p>
-          <a:p>
-            <a:pPr>
-              <a:spcAft>
-                <a:spcPts val="600"/>
-              </a:spcAft>
-            </a:pPr>
-            <a:r>
-              <a:rPr sz="1500">
-                <a:solidFill>
-                  <a:srgbClr val="22282E"/>
-                </a:solidFill>
-              </a:rPr>
-              <a:t>•  Sin métricas — El ejercicio no se puede valorar; calcula TTD/TTR/dwell</a:t>
-            </a:r>
-          </a:p>
-          <a:p>
-            <a:pPr>
-              <a:spcAft>
-                <a:spcPts val="600"/>
-              </a:spcAft>
-            </a:pPr>
-            <a:r>
-              <a:rPr sz="1500">
-                <a:solidFill>
-                  <a:srgbClr val="22282E"/>
-                </a:solidFill>
-              </a:rPr>
-              <a:t>•  Recomendaciones genéricas — No accionables; concreta acción, responsable y prioridad</a:t>
-            </a:r>
-          </a:p>
-          <a:p>
-            <a:pPr>
-              <a:spcAft>
-                <a:spcPts val="600"/>
-              </a:spcAft>
-            </a:pPr>
-            <a:r>
-              <a:rPr sz="1500">
-                <a:solidFill>
-                  <a:srgbClr val="22282E"/>
-                </a:solidFill>
-              </a:rPr>
-              <a:t>•  Informe filtrable — Sensible sin protección; cífralo y controla el acceso</a:t>
+              <a:t>•  Escribe un resumen ejecutivo de media página para una operación ficticia.</a:t>
+            </a:r>
+          </a:p>
+          <a:p>
+            <a:pPr>
+              <a:spcAft>
+                <a:spcPts val="600"/>
+              </a:spcAft>
+            </a:pPr>
+            <a:r>
+              <a:rPr sz="1500">
+                <a:solidFill>
+                  <a:srgbClr val="22282E"/>
+                </a:solidFill>
+              </a:rPr>
+              <a:t>•  Redacta la narrativa de 3 pasos de un attack path con evidencias.</a:t>
+            </a:r>
+          </a:p>
+          <a:p>
+            <a:pPr>
+              <a:spcAft>
+                <a:spcPts val="600"/>
+              </a:spcAft>
+            </a:pPr>
+            <a:r>
+              <a:rPr sz="1500">
+                <a:solidFill>
+                  <a:srgbClr val="22282E"/>
+                </a:solidFill>
+              </a:rPr>
+              <a:t>•  Crea una tabla de 5 hallazgos con severidad y recomendación.</a:t>
+            </a:r>
+          </a:p>
+          <a:p>
+            <a:pPr>
+              <a:spcAft>
+                <a:spcPts val="600"/>
+              </a:spcAft>
+            </a:pPr>
+            <a:r>
+              <a:rPr sz="1500">
+                <a:solidFill>
+                  <a:srgbClr val="22282E"/>
+                </a:solidFill>
+              </a:rPr>
+              <a:t>•  Calcula TTD y TTR de dos fases a partir de timestamps dados.</a:t>
+            </a:r>
+          </a:p>
+          <a:p>
+            <a:pPr>
+              <a:spcAft>
+                <a:spcPts val="600"/>
+              </a:spcAft>
+            </a:pPr>
+            <a:r>
+              <a:rPr sz="1500">
+                <a:solidFill>
+                  <a:srgbClr val="22282E"/>
+                </a:solidFill>
+              </a:rPr>
+              <a:t>•  Construye una capa de cobertura ATT&amp;CK del ejercicio.</a:t>
+            </a:r>
+          </a:p>
+          <a:p>
+            <a:pPr>
+              <a:spcAft>
+                <a:spcPts val="600"/>
+              </a:spcAft>
+            </a:pPr>
+            <a:r>
+              <a:rPr sz="1500">
+                <a:solidFill>
+                  <a:srgbClr val="22282E"/>
+                </a:solidFill>
+              </a:rPr>
+              <a:t>•  Prioriza 6 recomendaciones en una matriz impacto/esfuerzo.</a:t>
             </a:r>
           </a:p>
         </p:txBody>
@@ -3347,7 +3365,7 @@
                   <a:srgbClr val="0B3D2E"/>
                 </a:solidFill>
               </a:rPr>
-              <a:t>❓ Preguntas frecuentes</a:t>
+              <a:t>📝 Reto verificable</a:t>
             </a:r>
           </a:p>
         </p:txBody>
@@ -3385,82 +3403,22 @@
                   <a:srgbClr val="22282E"/>
                 </a:solidFill>
               </a:rPr>
-              <a:t>•  ❓ ¿Un informe de Red Team es como uno de pentest?</a:t>
-            </a:r>
-          </a:p>
-          <a:p>
-            <a:pPr>
-              <a:spcAft>
-                <a:spcPts val="600"/>
-              </a:spcAft>
-            </a:pPr>
-            <a:r>
-              <a:rPr sz="1500">
-                <a:solidFill>
-                  <a:srgbClr val="22282E"/>
-                </a:solidFill>
-              </a:rPr>
-              <a:t>•  Comparten estructura, pero el de Red Team enfatiza la narrativa del attack path y las métricas de detección/respuesta, no solo un catálogo de vulnerabilidades.</a:t>
-            </a:r>
-          </a:p>
-          <a:p>
-            <a:pPr>
-              <a:spcAft>
-                <a:spcPts val="600"/>
-              </a:spcAft>
-            </a:pPr>
-            <a:r>
-              <a:rPr sz="1500">
-                <a:solidFill>
-                  <a:srgbClr val="22282E"/>
-                </a:solidFill>
-              </a:rPr>
-              <a:t>•  ❓ ¿Debo listar TODO lo que hice?</a:t>
-            </a:r>
-          </a:p>
-          <a:p>
-            <a:pPr>
-              <a:spcAft>
-                <a:spcPts val="600"/>
-              </a:spcAft>
-            </a:pPr>
-            <a:r>
-              <a:rPr sz="1500">
-                <a:solidFill>
-                  <a:srgbClr val="22282E"/>
-                </a:solidFill>
-              </a:rPr>
-              <a:t>•  Lo relevante para reproducir y remediar, sí. El detalle exhaustivo va al apéndice técnico; el cuerpo cuenta la historia y prioriza.</a:t>
-            </a:r>
-          </a:p>
-          <a:p>
-            <a:pPr>
-              <a:spcAft>
-                <a:spcPts val="600"/>
-              </a:spcAft>
-            </a:pPr>
-            <a:r>
-              <a:rPr sz="1500">
-                <a:solidFill>
-                  <a:srgbClr val="22282E"/>
-                </a:solidFill>
-              </a:rPr>
-              <a:t>•  ❓ ¿Qué métrica valora más la dirección?</a:t>
-            </a:r>
-          </a:p>
-          <a:p>
-            <a:pPr>
-              <a:spcAft>
-                <a:spcPts val="600"/>
-              </a:spcAft>
-            </a:pPr>
-            <a:r>
-              <a:rPr sz="1500">
-                <a:solidFill>
-                  <a:srgbClr val="22282E"/>
-                </a:solidFill>
-              </a:rPr>
-              <a:t>•  El dwell time y el TTD/TTR: indican cuánto tiempo estuvo "dentro" el atacante y cómo respondió la organización, que es lo que el Red Team evalúa.</a:t>
+              <a:t>•  Produce un informe de Red Team completo de tu ejercicio en el AD lab: resumen ejecutivo, narrativa del attack path con mapeo ATT&amp;CK, tabla de hallazgos, métricas (TTD/TTR/dwell/cobertura) y…</a:t>
+            </a:r>
+          </a:p>
+          <a:p>
+            <a:pPr>
+              <a:spcAft>
+                <a:spcPts val="600"/>
+              </a:spcAft>
+            </a:pPr>
+            <a:r>
+              <a:rPr sz="1500">
+                <a:solidFill>
+                  <a:srgbClr val="22282E"/>
+                </a:solidFill>
+              </a:rPr>
+              <a:t>•  Criterio de aceptación: el informe permite a un ejecutivo entender el riesgo en la primera página y a un ingeniero reproducir y remediar cada hallazgo desde el detalle técnico; las métricas están…</a:t>
             </a:r>
           </a:p>
         </p:txBody>
@@ -3511,7 +3469,7 @@
                   <a:srgbClr val="0B3D2E"/>
                 </a:solidFill>
               </a:rPr>
-              <a:t>🔗 Referencias</a:t>
+              <a:t>⚠️ Errores comunes</a:t>
             </a:r>
           </a:p>
         </p:txBody>
@@ -3549,56 +3507,459 @@
                   <a:srgbClr val="22282E"/>
                 </a:solidFill>
               </a:rPr>
-              <a:t>•  Vest &amp; Tubberville — Red Team Development and Operations (reporting). &lt;https://redteam.guide/&gt;</a:t>
-            </a:r>
-          </a:p>
-          <a:p>
-            <a:pPr>
-              <a:spcAft>
-                <a:spcPts val="600"/>
-              </a:spcAft>
-            </a:pPr>
-            <a:r>
-              <a:rPr sz="1500">
-                <a:solidFill>
-                  <a:srgbClr val="22282E"/>
-                </a:solidFill>
-              </a:rPr>
-              <a:t>•  MITRE ATT&amp;CK Navigator. &lt;https://github.com/mitre-attack/attack-navigator&gt;</a:t>
-            </a:r>
-          </a:p>
-          <a:p>
-            <a:pPr>
-              <a:spcAft>
-                <a:spcPts val="600"/>
-              </a:spcAft>
-            </a:pPr>
-            <a:r>
-              <a:rPr sz="1500">
-                <a:solidFill>
-                  <a:srgbClr val="22282E"/>
-                </a:solidFill>
-              </a:rPr>
-              <a:t>•  SANS — plantillas de reporting de Red Team.</a:t>
-            </a:r>
-          </a:p>
-          <a:p>
-            <a:pPr>
-              <a:spcAft>
-                <a:spcPts val="600"/>
-              </a:spcAft>
-            </a:pPr>
-            <a:r>
-              <a:rPr sz="1500">
-                <a:solidFill>
-                  <a:srgbClr val="22282E"/>
-                </a:solidFill>
-              </a:rPr>
-              <a:t>•  NIST SP 800-115 — reporting de pruebas de seguridad.</a:t>
-            </a:r>
-          </a:p>
-        </p:txBody>
-      </p:sp>
+              <a:t>•  Resumen lleno de jerga — La dirección no lo entiende; reescribe en lenguaje de negocio</a:t>
+            </a:r>
+          </a:p>
+          <a:p>
+            <a:pPr>
+              <a:spcAft>
+                <a:spcPts val="600"/>
+              </a:spcAft>
+            </a:pPr>
+            <a:r>
+              <a:rPr sz="1500">
+                <a:solidFill>
+                  <a:srgbClr val="22282E"/>
+                </a:solidFill>
+              </a:rPr>
+              <a:t>•  Hallazgos no reproducibles — Faltan evidencias/pasos; usa el cuaderno con timestamps</a:t>
+            </a:r>
+          </a:p>
+          <a:p>
+            <a:pPr>
+              <a:spcAft>
+                <a:spcPts val="600"/>
+              </a:spcAft>
+            </a:pPr>
+            <a:r>
+              <a:rPr sz="1500">
+                <a:solidFill>
+                  <a:srgbClr val="22282E"/>
+                </a:solidFill>
+              </a:rPr>
+              <a:t>•  Sin métricas — El ejercicio no se puede valorar; calcula TTD/TTR/dwell</a:t>
+            </a:r>
+          </a:p>
+          <a:p>
+            <a:pPr>
+              <a:spcAft>
+                <a:spcPts val="600"/>
+              </a:spcAft>
+            </a:pPr>
+            <a:r>
+              <a:rPr sz="1500">
+                <a:solidFill>
+                  <a:srgbClr val="22282E"/>
+                </a:solidFill>
+              </a:rPr>
+              <a:t>•  Recomendaciones genéricas — No accionables; concreta acción, responsable y prioridad</a:t>
+            </a:r>
+          </a:p>
+          <a:p>
+            <a:pPr>
+              <a:spcAft>
+                <a:spcPts val="600"/>
+              </a:spcAft>
+            </a:pPr>
+            <a:r>
+              <a:rPr sz="1500">
+                <a:solidFill>
+                  <a:srgbClr val="22282E"/>
+                </a:solidFill>
+              </a:rPr>
+              <a:t>•  Informe filtrable — Sensible sin protección; cífralo y controla el acceso</a:t>
+            </a:r>
+          </a:p>
+        </p:txBody>
+      </p:sp>
+    </p:spTree>
+  </p:cSld>
+  <p:clrMapOvr>
+    <a:masterClrMapping/>
+  </p:clrMapOvr>
+</p:sld>
+</file>
+
+<file path=ppt/slides/slide13.xml><?xml version="1.0" encoding="utf-8"?>
+<p:sld xmlns:a="http://schemas.openxmlformats.org/drawingml/2006/main" xmlns:p="http://schemas.openxmlformats.org/presentationml/2006/main" xmlns:r="http://schemas.openxmlformats.org/officeDocument/2006/relationships">
+  <p:cSld>
+    <p:spTree>
+      <p:nvGrpSpPr>
+        <p:cNvPr id="1" name=""/>
+        <p:cNvGrpSpPr/>
+        <p:nvPr/>
+      </p:nvGrpSpPr>
+      <p:grpSpPr/>
+      <p:sp>
+        <p:nvSpPr>
+          <p:cNvPr id="2" name="TextBox 1"/>
+          <p:cNvSpPr txBox="1"/>
+          <p:nvPr/>
+        </p:nvSpPr>
+        <p:spPr>
+          <a:xfrm>
+            <a:off x="457200" y="320040"/>
+            <a:ext cx="8229600" cy="822960"/>
+          </a:xfrm>
+          <a:prstGeom prst="rect">
+            <a:avLst/>
+          </a:prstGeom>
+          <a:noFill/>
+        </p:spPr>
+        <p:txBody>
+          <a:bodyPr wrap="square">
+            <a:spAutoFit/>
+          </a:bodyPr>
+          <a:lstStyle/>
+          <a:p>
+            <a:r>
+              <a:rPr sz="2600" b="1">
+                <a:solidFill>
+                  <a:srgbClr val="0B3D2E"/>
+                </a:solidFill>
+              </a:rPr>
+              <a:t>❓ Preguntas frecuentes</a:t>
+            </a:r>
+          </a:p>
+        </p:txBody>
+      </p:sp>
+      <p:sp>
+        <p:nvSpPr>
+          <p:cNvPr id="3" name="TextBox 2"/>
+          <p:cNvSpPr txBox="1"/>
+          <p:nvPr/>
+        </p:nvSpPr>
+        <p:spPr>
+          <a:xfrm>
+            <a:off x="457200" y="1280160"/>
+            <a:ext cx="8229600" cy="4937760"/>
+          </a:xfrm>
+          <a:prstGeom prst="rect">
+            <a:avLst/>
+          </a:prstGeom>
+          <a:noFill/>
+        </p:spPr>
+        <p:txBody>
+          <a:bodyPr wrap="square">
+            <a:spAutoFit/>
+          </a:bodyPr>
+          <a:lstStyle/>
+          <a:p>
+            <a:pPr>
+              <a:spcAft>
+                <a:spcPts val="600"/>
+              </a:spcAft>
+            </a:pPr>
+            <a:r>
+              <a:rPr sz="1500">
+                <a:solidFill>
+                  <a:srgbClr val="22282E"/>
+                </a:solidFill>
+              </a:rPr>
+              <a:t>•  ❓ ¿Un informe de Red Team es como uno de pentest?</a:t>
+            </a:r>
+          </a:p>
+          <a:p>
+            <a:pPr>
+              <a:spcAft>
+                <a:spcPts val="600"/>
+              </a:spcAft>
+            </a:pPr>
+            <a:r>
+              <a:rPr sz="1500">
+                <a:solidFill>
+                  <a:srgbClr val="22282E"/>
+                </a:solidFill>
+              </a:rPr>
+              <a:t>•  Comparten estructura, pero el de Red Team enfatiza la narrativa del attack path y las métricas de detección/respuesta, no solo un catálogo de vulnerabilidades.</a:t>
+            </a:r>
+          </a:p>
+          <a:p>
+            <a:pPr>
+              <a:spcAft>
+                <a:spcPts val="600"/>
+              </a:spcAft>
+            </a:pPr>
+            <a:r>
+              <a:rPr sz="1500">
+                <a:solidFill>
+                  <a:srgbClr val="22282E"/>
+                </a:solidFill>
+              </a:rPr>
+              <a:t>•  ❓ ¿Debo listar TODO lo que hice?</a:t>
+            </a:r>
+          </a:p>
+          <a:p>
+            <a:pPr>
+              <a:spcAft>
+                <a:spcPts val="600"/>
+              </a:spcAft>
+            </a:pPr>
+            <a:r>
+              <a:rPr sz="1500">
+                <a:solidFill>
+                  <a:srgbClr val="22282E"/>
+                </a:solidFill>
+              </a:rPr>
+              <a:t>•  Lo relevante para reproducir y remediar, sí. El detalle exhaustivo va al apéndice técnico; el cuerpo cuenta la historia y prioriza.</a:t>
+            </a:r>
+          </a:p>
+          <a:p>
+            <a:pPr>
+              <a:spcAft>
+                <a:spcPts val="600"/>
+              </a:spcAft>
+            </a:pPr>
+            <a:r>
+              <a:rPr sz="1500">
+                <a:solidFill>
+                  <a:srgbClr val="22282E"/>
+                </a:solidFill>
+              </a:rPr>
+              <a:t>•  ❓ ¿Qué métrica valora más la dirección?</a:t>
+            </a:r>
+          </a:p>
+          <a:p>
+            <a:pPr>
+              <a:spcAft>
+                <a:spcPts val="600"/>
+              </a:spcAft>
+            </a:pPr>
+            <a:r>
+              <a:rPr sz="1500">
+                <a:solidFill>
+                  <a:srgbClr val="22282E"/>
+                </a:solidFill>
+              </a:rPr>
+              <a:t>•  El dwell time y el TTD/TTR: indican cuánto tiempo estuvo "dentro" el atacante y cómo respondió la organización, que es lo que el Red Team evalúa.</a:t>
+            </a:r>
+          </a:p>
+        </p:txBody>
+      </p:sp>
+    </p:spTree>
+  </p:cSld>
+  <p:clrMapOvr>
+    <a:masterClrMapping/>
+  </p:clrMapOvr>
+</p:sld>
+</file>
+
+<file path=ppt/slides/slide14.xml><?xml version="1.0" encoding="utf-8"?>
+<p:sld xmlns:a="http://schemas.openxmlformats.org/drawingml/2006/main" xmlns:p="http://schemas.openxmlformats.org/presentationml/2006/main" xmlns:r="http://schemas.openxmlformats.org/officeDocument/2006/relationships">
+  <p:cSld>
+    <p:spTree>
+      <p:nvGrpSpPr>
+        <p:cNvPr id="1" name=""/>
+        <p:cNvGrpSpPr/>
+        <p:nvPr/>
+      </p:nvGrpSpPr>
+      <p:grpSpPr/>
+      <p:sp>
+        <p:nvSpPr>
+          <p:cNvPr id="2" name="TextBox 1"/>
+          <p:cNvSpPr txBox="1"/>
+          <p:nvPr/>
+        </p:nvSpPr>
+        <p:spPr>
+          <a:xfrm>
+            <a:off x="457200" y="320040"/>
+            <a:ext cx="8229600" cy="822960"/>
+          </a:xfrm>
+          <a:prstGeom prst="rect">
+            <a:avLst/>
+          </a:prstGeom>
+          <a:noFill/>
+        </p:spPr>
+        <p:txBody>
+          <a:bodyPr wrap="square">
+            <a:spAutoFit/>
+          </a:bodyPr>
+          <a:lstStyle/>
+          <a:p>
+            <a:r>
+              <a:rPr sz="2600" b="1">
+                <a:solidFill>
+                  <a:srgbClr val="0B3D2E"/>
+                </a:solidFill>
+              </a:rPr>
+              <a:t>🔗 Referencias</a:t>
+            </a:r>
+          </a:p>
+        </p:txBody>
+      </p:sp>
+      <p:sp>
+        <p:nvSpPr>
+          <p:cNvPr id="3" name="TextBox 2"/>
+          <p:cNvSpPr txBox="1"/>
+          <p:nvPr/>
+        </p:nvSpPr>
+        <p:spPr>
+          <a:xfrm>
+            <a:off x="457200" y="1280160"/>
+            <a:ext cx="8229600" cy="4937760"/>
+          </a:xfrm>
+          <a:prstGeom prst="rect">
+            <a:avLst/>
+          </a:prstGeom>
+          <a:noFill/>
+        </p:spPr>
+        <p:txBody>
+          <a:bodyPr wrap="square">
+            <a:spAutoFit/>
+          </a:bodyPr>
+          <a:lstStyle/>
+          <a:p>
+            <a:pPr>
+              <a:spcAft>
+                <a:spcPts val="600"/>
+              </a:spcAft>
+            </a:pPr>
+            <a:r>
+              <a:rPr sz="1500">
+                <a:solidFill>
+                  <a:srgbClr val="22282E"/>
+                </a:solidFill>
+              </a:rPr>
+              <a:t>•  NIST — Technical Guide to Information Security Testing and Assessment, SP 800-115. &lt;https://doi.org/10.6028/NIST.SP.800-115&gt; — fuente principal para análisis, causa raíz, mitigación y reporte…</a:t>
+            </a:r>
+          </a:p>
+          <a:p>
+            <a:pPr>
+              <a:spcAft>
+                <a:spcPts val="600"/>
+              </a:spcAft>
+            </a:pPr>
+            <a:r>
+              <a:rPr sz="1500">
+                <a:solidFill>
+                  <a:srgbClr val="22282E"/>
+                </a:solidFill>
+              </a:rPr>
+              <a:t>•  Vest &amp; Tubberville — Red Team Development and Operations. &lt;https://redteam.guide/&gt; — estructura operativa y comunicación de ejercicios red team.</a:t>
+            </a:r>
+          </a:p>
+          <a:p>
+            <a:pPr>
+              <a:spcAft>
+                <a:spcPts val="600"/>
+              </a:spcAft>
+            </a:pPr>
+            <a:r>
+              <a:rPr sz="1500">
+                <a:solidFill>
+                  <a:srgbClr val="22282E"/>
+                </a:solidFill>
+              </a:rPr>
+              <a:t>•  MITRE ATT&amp;CK Navigator. &lt;https://github.com/mitre-attack/attack-navigator&gt; — referencia oficial de capas para visualizar mapeos y cobertura.</a:t>
+            </a:r>
+          </a:p>
+          <a:p>
+            <a:pPr>
+              <a:spcAft>
+                <a:spcPts val="600"/>
+              </a:spcAft>
+            </a:pPr>
+            <a:r>
+              <a:rPr sz="1500">
+                <a:solidFill>
+                  <a:srgbClr val="22282E"/>
+                </a:solidFill>
+              </a:rPr>
+              <a:t>•  MITRE ATT&amp;CK — Get Started: Defenders. &lt;https://attack.mitre.org/resources/get-started/&gt; — guía para usar ATT&amp;CK como conocimiento y no como puntuación automática de riesgo.</a:t>
+            </a:r>
+          </a:p>
+          <a:p>
+            <a:pPr>
+              <a:spcAft>
+                <a:spcPts val="600"/>
+              </a:spcAft>
+            </a:pPr>
+            <a:r>
+              <a:rPr sz="1500">
+                <a:solidFill>
+                  <a:srgbClr val="22282E"/>
+                </a:solidFill>
+              </a:rPr>
+              <a:t>•  NIST — Incident Response Recommendations and Considerations for Cybersecurity Risk Management, SP 800-61 Rev. 3. &lt;https://doi.org/10.6028/NIST.SP.800-61r3&gt; — guía vigente para integrar detección…</a:t>
+            </a:r>
+          </a:p>
+        </p:txBody>
+      </p:sp>
+    </p:spTree>
+  </p:cSld>
+  <p:clrMapOvr>
+    <a:masterClrMapping/>
+  </p:clrMapOvr>
+</p:sld>
+</file>
+
+<file path=ppt/slides/slide15.xml><?xml version="1.0" encoding="utf-8"?>
+<p:sld xmlns:a="http://schemas.openxmlformats.org/drawingml/2006/main" xmlns:p="http://schemas.openxmlformats.org/presentationml/2006/main" xmlns:r="http://schemas.openxmlformats.org/officeDocument/2006/relationships">
+  <p:cSld>
+    <p:spTree>
+      <p:nvGrpSpPr>
+        <p:cNvPr id="1" name=""/>
+        <p:cNvGrpSpPr/>
+        <p:nvPr/>
+      </p:nvGrpSpPr>
+      <p:grpSpPr/>
+      <p:sp>
+        <p:nvSpPr>
+          <p:cNvPr id="2" name="TextBox 1"/>
+          <p:cNvSpPr txBox="1"/>
+          <p:nvPr/>
+        </p:nvSpPr>
+        <p:spPr>
+          <a:xfrm>
+            <a:off x="457200" y="274320"/>
+            <a:ext cx="8229600" cy="640080"/>
+          </a:xfrm>
+          <a:prstGeom prst="rect">
+            <a:avLst/>
+          </a:prstGeom>
+          <a:noFill/>
+        </p:spPr>
+        <p:txBody>
+          <a:bodyPr wrap="square">
+            <a:spAutoFit/>
+          </a:bodyPr>
+          <a:lstStyle/>
+          <a:p>
+            <a:r>
+              <a:rPr sz="2200" b="1">
+                <a:solidFill>
+                  <a:srgbClr val="0B3D2E"/>
+                </a:solidFill>
+              </a:rPr>
+              <a:t>Diagrama de la clase</a:t>
+            </a:r>
+          </a:p>
+        </p:txBody>
+      </p:sp>
+      <p:pic>
+        <p:nvPicPr>
+          <p:cNvPr id="3" name="Picture 2" descr="d9ad13c392b59eab.png"/>
+          <p:cNvPicPr>
+            <a:picLocks noChangeAspect="1"/>
+          </p:cNvPicPr>
+          <p:nvPr/>
+        </p:nvPicPr>
+        <p:blipFill>
+          <a:blip r:embed="rId2"/>
+          <a:stretch>
+            <a:fillRect/>
+          </a:stretch>
+        </p:blipFill>
+        <p:spPr>
+          <a:xfrm>
+            <a:off x="457200" y="3140964"/>
+            <a:ext cx="8229600" cy="1216152"/>
+          </a:xfrm>
+          <a:prstGeom prst="rect">
+            <a:avLst/>
+          </a:prstGeom>
+        </p:spPr>
+      </p:pic>
     </p:spTree>
   </p:cSld>
   <p:clrMapOvr>
@@ -3683,7 +4044,7 @@
                   <a:srgbClr val="22282E"/>
                 </a:solidFill>
               </a:rPr>
-              <a:t>•  Cerrar el ciclo de una operación con el entregable que le da valor: un informe claro, honesto y accionable, respaldado por métricas defensivas. El alumno aprenderá a estructurar un informe de Red Team, a narrar la ruta de ataque, a mapear cada acción a ATT&amp;CK y a comunicar métricas como tiempo-a-detección y cobertura de forma que la dirección y el SOC actúen.</a:t>
+              <a:t>•  Cerrar el ciclo de una operación con el entregable que le da valor: un informe claro, honesto y accionable, respaldado por métricas defensivas. El alumno aprenderá a estructurar un informe de Red…</a:t>
             </a:r>
           </a:p>
         </p:txBody>
@@ -4077,7 +4438,7 @@
                   <a:srgbClr val="0B3D2E"/>
                 </a:solidFill>
               </a:rPr>
-              <a:t>📖 Definiciones y características</a:t>
+              <a:t>🧠 Explicación en profundidad</a:t>
             </a:r>
           </a:p>
         </p:txBody>
@@ -4115,82 +4476,97 @@
                   <a:srgbClr val="22282E"/>
                 </a:solidFill>
               </a:rPr>
-              <a:t>•  Resumen ejecutivo: síntesis no técnica del riesgo y el impacto. Característica: sin jerga, orientada a decisiones.</a:t>
-            </a:r>
-          </a:p>
-          <a:p>
-            <a:pPr>
-              <a:spcAft>
-                <a:spcPts val="600"/>
-              </a:spcAft>
-            </a:pPr>
-            <a:r>
-              <a:rPr sz="1500">
-                <a:solidFill>
-                  <a:srgbClr val="22282E"/>
-                </a:solidFill>
-              </a:rPr>
-              <a:t>•  Attack path narrative: relato paso a paso de cómo se llegó al objetivo. Característica: reproducible y con evidencias.</a:t>
-            </a:r>
-          </a:p>
-          <a:p>
-            <a:pPr>
-              <a:spcAft>
-                <a:spcPts val="600"/>
-              </a:spcAft>
-            </a:pPr>
-            <a:r>
-              <a:rPr sz="1500">
-                <a:solidFill>
-                  <a:srgbClr val="22282E"/>
-                </a:solidFill>
-              </a:rPr>
-              <a:t>•  TTD (Time To Detect): tiempo desde una acción hasta su detección. Característica: mide la visibilidad del SOC.</a:t>
-            </a:r>
-          </a:p>
-          <a:p>
-            <a:pPr>
-              <a:spcAft>
-                <a:spcPts val="600"/>
-              </a:spcAft>
-            </a:pPr>
-            <a:r>
-              <a:rPr sz="1500">
-                <a:solidFill>
-                  <a:srgbClr val="22282E"/>
-                </a:solidFill>
-              </a:rPr>
-              <a:t>•  TTR (Time To Respond): tiempo desde la detección hasta la respuesta. Característica: mide la reacción.</a:t>
-            </a:r>
-          </a:p>
-          <a:p>
-            <a:pPr>
-              <a:spcAft>
-                <a:spcPts val="600"/>
-              </a:spcAft>
-            </a:pPr>
-            <a:r>
-              <a:rPr sz="1500">
-                <a:solidFill>
-                  <a:srgbClr val="22282E"/>
-                </a:solidFill>
-              </a:rPr>
-              <a:t>•  Dwell time: tiempo que el atacante permanece sin ser detectado. Característica: métrica clave de exposición.</a:t>
-            </a:r>
-          </a:p>
-          <a:p>
-            <a:pPr>
-              <a:spcAft>
-                <a:spcPts val="600"/>
-              </a:spcAft>
-            </a:pPr>
-            <a:r>
-              <a:rPr sz="1500">
-                <a:solidFill>
-                  <a:srgbClr val="22282E"/>
-                </a:solidFill>
-              </a:rPr>
-              <a:t>•  Cobertura ATT&amp;CK: qué técnicas fueron detectadas. Característica: se visualiza en Navigator y guía la mejora.</a:t>
+              <a:t>•  El reporte no es el diario cronológico del operador. Selecciona evidencia suficiente para explicar qué objetivo se alcanzó, qué condición lo permitió, qué impacto sería razonable y qué cambio reduce…</a:t>
+            </a:r>
+          </a:p>
+          <a:p>
+            <a:pPr>
+              <a:spcAft>
+                <a:spcPts val="600"/>
+              </a:spcAft>
+            </a:pPr>
+            <a:r>
+              <a:rPr sz="1500">
+                <a:solidFill>
+                  <a:srgbClr val="22282E"/>
+                </a:solidFill>
+              </a:rPr>
+              <a:t>•  El resumen ejecutivo evita nombres de herramientas salvo que sean relevantes para la decisión. Describe escenario, activos o procesos afectados, controles que funcionaron, exposición residual y…</a:t>
+            </a:r>
+          </a:p>
+          <a:p>
+            <a:pPr>
+              <a:spcAft>
+                <a:spcPts val="600"/>
+              </a:spcAft>
+            </a:pPr>
+            <a:r>
+              <a:rPr sz="1500">
+                <a:solidFill>
+                  <a:srgbClr val="22282E"/>
+                </a:solidFill>
+              </a:rPr>
+              <a:t>•  La narrativa une cada salto con una evidencia y explica por qué habilitó el siguiente. No basta con enumerar comandos. También se registran controles que detuvieron o detectaron actividad y las…</a:t>
+            </a:r>
+          </a:p>
+          <a:p>
+            <a:pPr>
+              <a:spcAft>
+                <a:spcPts val="600"/>
+              </a:spcAft>
+            </a:pPr>
+            <a:r>
+              <a:rPr sz="1500">
+                <a:solidFill>
+                  <a:srgbClr val="22282E"/>
+                </a:solidFill>
+              </a:rPr>
+              <a:t>•  ATT&amp;CK aporta un lenguaje común, no una puntuación de riesgo. Un mapeo debe llegar al nivel de técnica o subtécnica sustentada por el procedimiento observado. Asignar muchas técnicas no vuelve más…</a:t>
+            </a:r>
+          </a:p>
+          <a:p>
+            <a:pPr>
+              <a:spcAft>
+                <a:spcPts val="600"/>
+              </a:spcAft>
+            </a:pPr>
+            <a:r>
+              <a:rPr sz="1500">
+                <a:solidFill>
+                  <a:srgbClr val="22282E"/>
+                </a:solidFill>
+              </a:rPr>
+              <a:t>•  Time to Detect carece de significado si no se declara desde qué instante se mide: inicio de la acción, primer evento disponible o final de ejecución. Time to Respond puede significar tiempo hasta…</a:t>
+            </a:r>
+          </a:p>
+          <a:p>
+            <a:pPr>
+              <a:spcAft>
+                <a:spcPts val="600"/>
+              </a:spcAft>
+            </a:pPr>
+            <a:r>
+              <a:rPr sz="1500">
+                <a:solidFill>
+                  <a:srgbClr val="22282E"/>
+                </a:solidFill>
+              </a:rPr>
+              <a:t>•  Promedios aislados esconden distribución y criticidad. Se reportan muestra, mediana o percentiles cuando haya suficientes observaciones, y se separan técnicas, turnos y severidades. Una única…</a:t>
+            </a:r>
+          </a:p>
+          <a:p>
+            <a:pPr>
+              <a:spcAft>
+                <a:spcPts val="600"/>
+              </a:spcAft>
+            </a:pPr>
+            <a:r>
+              <a:rPr sz="1500">
+                <a:solidFill>
+                  <a:srgbClr val="22282E"/>
+                </a:solidFill>
+              </a:rPr>
+              <a:t>•  «Mejorar monitoreo» no es accionable. Una buena recomendación identifica la condición raíz, control propuesto, responsable probable, prioridad, dependencia y prueba de verificación. Se distingue…</a:t>
             </a:r>
           </a:p>
         </p:txBody>
@@ -4241,7 +4617,7 @@
                   <a:srgbClr val="0B3D2E"/>
                 </a:solidFill>
               </a:rPr>
-              <a:t>🧰 Herramientas y preparación</a:t>
+              <a:t>📖 Definiciones y características</a:t>
             </a:r>
           </a:p>
         </p:txBody>
@@ -4279,52 +4655,82 @@
                   <a:srgbClr val="22282E"/>
                 </a:solidFill>
               </a:rPr>
-              <a:t>•  El cuaderno de operación (Clase 176) con timestamps y evidencias.</a:t>
-            </a:r>
-          </a:p>
-          <a:p>
-            <a:pPr>
-              <a:spcAft>
-                <a:spcPts val="600"/>
-              </a:spcAft>
-            </a:pPr>
-            <a:r>
-              <a:rPr sz="1500">
-                <a:solidFill>
-                  <a:srgbClr val="22282E"/>
-                </a:solidFill>
-              </a:rPr>
-              <a:t>•  ATT&amp;CK Navigator para la capa de cobertura del informe.</a:t>
-            </a:r>
-          </a:p>
-          <a:p>
-            <a:pPr>
-              <a:spcAft>
-                <a:spcPts val="600"/>
-              </a:spcAft>
-            </a:pPr>
-            <a:r>
-              <a:rPr sz="1500">
-                <a:solidFill>
-                  <a:srgbClr val="22282E"/>
-                </a:solidFill>
-              </a:rPr>
-              <a:t>•  Plantilla de informe (executive summary + narrativa + hallazgos + recomendaciones + apéndice técnico).</a:t>
-            </a:r>
-          </a:p>
-          <a:p>
-            <a:pPr>
-              <a:spcAft>
-                <a:spcPts val="600"/>
-              </a:spcAft>
-            </a:pPr>
-            <a:r>
-              <a:rPr sz="1500">
-                <a:solidFill>
-                  <a:srgbClr val="22282E"/>
-                </a:solidFill>
-              </a:rPr>
-              <a:t>•  Datos de detección del ciclo purple (Clase 178) para las métricas.</a:t>
+              <a:t>•  Resumen ejecutivo: síntesis no técnica del riesgo y el impacto. Característica: sin jerga, orientada a decisiones.</a:t>
+            </a:r>
+          </a:p>
+          <a:p>
+            <a:pPr>
+              <a:spcAft>
+                <a:spcPts val="600"/>
+              </a:spcAft>
+            </a:pPr>
+            <a:r>
+              <a:rPr sz="1500">
+                <a:solidFill>
+                  <a:srgbClr val="22282E"/>
+                </a:solidFill>
+              </a:rPr>
+              <a:t>•  Attack path narrative: relato paso a paso de cómo se llegó al objetivo. Característica: reproducible y con evidencias.</a:t>
+            </a:r>
+          </a:p>
+          <a:p>
+            <a:pPr>
+              <a:spcAft>
+                <a:spcPts val="600"/>
+              </a:spcAft>
+            </a:pPr>
+            <a:r>
+              <a:rPr sz="1500">
+                <a:solidFill>
+                  <a:srgbClr val="22282E"/>
+                </a:solidFill>
+              </a:rPr>
+              <a:t>•  TTD (Time To Detect): tiempo desde una acción hasta su detección. Característica: mide la visibilidad del SOC.</a:t>
+            </a:r>
+          </a:p>
+          <a:p>
+            <a:pPr>
+              <a:spcAft>
+                <a:spcPts val="600"/>
+              </a:spcAft>
+            </a:pPr>
+            <a:r>
+              <a:rPr sz="1500">
+                <a:solidFill>
+                  <a:srgbClr val="22282E"/>
+                </a:solidFill>
+              </a:rPr>
+              <a:t>•  TTR (Time To Respond): tiempo desde la detección hasta la respuesta. Característica: mide la reacción.</a:t>
+            </a:r>
+          </a:p>
+          <a:p>
+            <a:pPr>
+              <a:spcAft>
+                <a:spcPts val="600"/>
+              </a:spcAft>
+            </a:pPr>
+            <a:r>
+              <a:rPr sz="1500">
+                <a:solidFill>
+                  <a:srgbClr val="22282E"/>
+                </a:solidFill>
+              </a:rPr>
+              <a:t>•  Dwell time: tiempo que el atacante permanece sin ser detectado. Característica: métrica clave de exposición.</a:t>
+            </a:r>
+          </a:p>
+          <a:p>
+            <a:pPr>
+              <a:spcAft>
+                <a:spcPts val="600"/>
+              </a:spcAft>
+            </a:pPr>
+            <a:r>
+              <a:rPr sz="1500">
+                <a:solidFill>
+                  <a:srgbClr val="22282E"/>
+                </a:solidFill>
+              </a:rPr>
+              <a:t>•  Cobertura ATT&amp;CK: qué técnicas fueron detectadas. Característica: se visualiza en Navigator y guía la mejora.</a:t>
             </a:r>
           </a:p>
         </p:txBody>
@@ -4375,7 +4781,7 @@
                   <a:srgbClr val="0B3D2E"/>
                 </a:solidFill>
               </a:rPr>
-              <a:t>🧪 Laboratorio guiado (ejercicio aplicado)</a:t>
+              <a:t>📔 Glosario</a:t>
             </a:r>
           </a:p>
         </p:txBody>
@@ -4413,97 +4819,97 @@
                   <a:srgbClr val="22282E"/>
                 </a:solidFill>
               </a:rPr>
-              <a:t>•  Reúne el material. Toma el cuaderno de la operación en tu AD lab (foothold → AD → DA) con timestamps y capturas.</a:t>
-            </a:r>
-          </a:p>
-          <a:p>
-            <a:pPr>
-              <a:spcAft>
-                <a:spcPts val="600"/>
-              </a:spcAft>
-            </a:pPr>
-            <a:r>
-              <a:rPr sz="1500">
-                <a:solidFill>
-                  <a:srgbClr val="22282E"/>
-                </a:solidFill>
-              </a:rPr>
-              <a:t>•  Redacta el resumen ejecutivo. Media página: objetivo, si se alcanzó, riesgo de negocio y 3 recomendaciones clave, sin jerga.</a:t>
-            </a:r>
-          </a:p>
-          <a:p>
-            <a:pPr>
-              <a:spcAft>
-                <a:spcPts val="600"/>
-              </a:spcAft>
-            </a:pPr>
-            <a:r>
-              <a:rPr sz="1500">
-                <a:solidFill>
-                  <a:srgbClr val="22282E"/>
-                </a:solidFill>
-              </a:rPr>
-              <a:t>•  Escribe la narrativa. Cuenta el attack path en orden, cada paso con: acción, evidencia, ID ATT&amp;CK y si fue detectado.</a:t>
-            </a:r>
-          </a:p>
-          <a:p>
-            <a:pPr>
-              <a:spcAft>
-                <a:spcPts val="600"/>
-              </a:spcAft>
-            </a:pPr>
-            <a:r>
-              <a:rPr sz="1500">
-                <a:solidFill>
-                  <a:srgbClr val="22282E"/>
-                </a:solidFill>
-              </a:rPr>
-              <a:t>•  Construye la tabla de hallazgos. Cada hallazgo con severidad, impacto, técnica ATT&amp;CK y recomendación priorizada.</a:t>
-            </a:r>
-          </a:p>
-          <a:p>
-            <a:pPr>
-              <a:spcAft>
-                <a:spcPts val="600"/>
-              </a:spcAft>
-            </a:pPr>
-            <a:r>
-              <a:rPr sz="1500">
-                <a:solidFill>
-                  <a:srgbClr val="22282E"/>
-                </a:solidFill>
-              </a:rPr>
-              <a:t>•  Calcula métricas. Para cada fase, deriva TTD y TTR a partir de los timestamps del cuaderno y los datos del SOC; estima el dwell time global.</a:t>
-            </a:r>
-          </a:p>
-          <a:p>
-            <a:pPr>
-              <a:spcAft>
-                <a:spcPts val="600"/>
-              </a:spcAft>
-            </a:pPr>
-            <a:r>
-              <a:rPr sz="1500">
-                <a:solidFill>
-                  <a:srgbClr val="22282E"/>
-                </a:solidFill>
-              </a:rPr>
-              <a:t>•  Genera la capa de cobertura. En Navigator, marca en verde/rojo las técnicas detectadas/no detectadas y expórtala como anexo.</a:t>
-            </a:r>
-          </a:p>
-          <a:p>
-            <a:pPr>
-              <a:spcAft>
-                <a:spcPts val="600"/>
-              </a:spcAft>
-            </a:pPr>
-            <a:r>
-              <a:rPr sz="1500">
-                <a:solidFill>
-                  <a:srgbClr val="22282E"/>
-                </a:solidFill>
-              </a:rPr>
-              <a:t>•  Prioriza recomendaciones. Ordénalas en una matriz impacto/esfuerzo para que el cliente sepa por dónde empezar.</a:t>
+              <a:t>•  Audiencia: grupo que usa el informe para tomar un tipo concreto de decisión.</a:t>
+            </a:r>
+          </a:p>
+          <a:p>
+            <a:pPr>
+              <a:spcAft>
+                <a:spcPts val="600"/>
+              </a:spcAft>
+            </a:pPr>
+            <a:r>
+              <a:rPr sz="1500">
+                <a:solidFill>
+                  <a:srgbClr val="22282E"/>
+                </a:solidFill>
+              </a:rPr>
+              <a:t>•  Resumen ejecutivo: síntesis del escenario, impacto y prioridades sin detalle operativo innecesario.</a:t>
+            </a:r>
+          </a:p>
+          <a:p>
+            <a:pPr>
+              <a:spcAft>
+                <a:spcPts val="600"/>
+              </a:spcAft>
+            </a:pPr>
+            <a:r>
+              <a:rPr sz="1500">
+                <a:solidFill>
+                  <a:srgbClr val="22282E"/>
+                </a:solidFill>
+              </a:rPr>
+              <a:t>•  Hallazgo: condición demostrada con evidencia, impacto, causa y recomendación.</a:t>
+            </a:r>
+          </a:p>
+          <a:p>
+            <a:pPr>
+              <a:spcAft>
+                <a:spcPts val="600"/>
+              </a:spcAft>
+            </a:pPr>
+            <a:r>
+              <a:rPr sz="1500">
+                <a:solidFill>
+                  <a:srgbClr val="22282E"/>
+                </a:solidFill>
+              </a:rPr>
+              <a:t>•  Attack path narrative: explicación causal de los pasos que conectaron acceso e impacto.</a:t>
+            </a:r>
+          </a:p>
+          <a:p>
+            <a:pPr>
+              <a:spcAft>
+                <a:spcPts val="600"/>
+              </a:spcAft>
+            </a:pPr>
+            <a:r>
+              <a:rPr sz="1500">
+                <a:solidFill>
+                  <a:srgbClr val="22282E"/>
+                </a:solidFill>
+              </a:rPr>
+              <a:t>•  Evidencia reproducible: dato suficiente para verificar el hecho sin repetir daño innecesario.</a:t>
+            </a:r>
+          </a:p>
+          <a:p>
+            <a:pPr>
+              <a:spcAft>
+                <a:spcPts val="600"/>
+              </a:spcAft>
+            </a:pPr>
+            <a:r>
+              <a:rPr sz="1500">
+                <a:solidFill>
+                  <a:srgbClr val="22282E"/>
+                </a:solidFill>
+              </a:rPr>
+              <a:t>•  TTD: intervalo definido entre un hito de actividad y el hito acordado de detección.</a:t>
+            </a:r>
+          </a:p>
+          <a:p>
+            <a:pPr>
+              <a:spcAft>
+                <a:spcPts val="600"/>
+              </a:spcAft>
+            </a:pPr>
+            <a:r>
+              <a:rPr sz="1500">
+                <a:solidFill>
+                  <a:srgbClr val="22282E"/>
+                </a:solidFill>
+              </a:rPr>
+              <a:t>•  TTR: intervalo entre detección y un hito explícito de respuesta.</a:t>
             </a:r>
           </a:p>
         </p:txBody>
@@ -4554,7 +4960,7 @@
                   <a:srgbClr val="0B3D2E"/>
                 </a:solidFill>
               </a:rPr>
-              <a:t>✍️ Ejercicios</a:t>
+              <a:t>🧰 Herramientas y preparación</a:t>
             </a:r>
           </a:p>
         </p:txBody>
@@ -4592,82 +4998,52 @@
                   <a:srgbClr val="22282E"/>
                 </a:solidFill>
               </a:rPr>
-              <a:t>•  Escribe un resumen ejecutivo de media página para una operación ficticia.</a:t>
-            </a:r>
-          </a:p>
-          <a:p>
-            <a:pPr>
-              <a:spcAft>
-                <a:spcPts val="600"/>
-              </a:spcAft>
-            </a:pPr>
-            <a:r>
-              <a:rPr sz="1500">
-                <a:solidFill>
-                  <a:srgbClr val="22282E"/>
-                </a:solidFill>
-              </a:rPr>
-              <a:t>•  Redacta la narrativa de 3 pasos de un attack path con evidencias.</a:t>
-            </a:r>
-          </a:p>
-          <a:p>
-            <a:pPr>
-              <a:spcAft>
-                <a:spcPts val="600"/>
-              </a:spcAft>
-            </a:pPr>
-            <a:r>
-              <a:rPr sz="1500">
-                <a:solidFill>
-                  <a:srgbClr val="22282E"/>
-                </a:solidFill>
-              </a:rPr>
-              <a:t>•  Crea una tabla de 5 hallazgos con severidad y recomendación.</a:t>
-            </a:r>
-          </a:p>
-          <a:p>
-            <a:pPr>
-              <a:spcAft>
-                <a:spcPts val="600"/>
-              </a:spcAft>
-            </a:pPr>
-            <a:r>
-              <a:rPr sz="1500">
-                <a:solidFill>
-                  <a:srgbClr val="22282E"/>
-                </a:solidFill>
-              </a:rPr>
-              <a:t>•  Calcula TTD y TTR de dos fases a partir de timestamps dados.</a:t>
-            </a:r>
-          </a:p>
-          <a:p>
-            <a:pPr>
-              <a:spcAft>
-                <a:spcPts val="600"/>
-              </a:spcAft>
-            </a:pPr>
-            <a:r>
-              <a:rPr sz="1500">
-                <a:solidFill>
-                  <a:srgbClr val="22282E"/>
-                </a:solidFill>
-              </a:rPr>
-              <a:t>•  Construye una capa de cobertura ATT&amp;CK del ejercicio.</a:t>
-            </a:r>
-          </a:p>
-          <a:p>
-            <a:pPr>
-              <a:spcAft>
-                <a:spcPts val="600"/>
-              </a:spcAft>
-            </a:pPr>
-            <a:r>
-              <a:rPr sz="1500">
-                <a:solidFill>
-                  <a:srgbClr val="22282E"/>
-                </a:solidFill>
-              </a:rPr>
-              <a:t>•  Prioriza 6 recomendaciones en una matriz impacto/esfuerzo.</a:t>
+              <a:t>•  El cuaderno de operación (Clase 176) con timestamps y evidencias.</a:t>
+            </a:r>
+          </a:p>
+          <a:p>
+            <a:pPr>
+              <a:spcAft>
+                <a:spcPts val="600"/>
+              </a:spcAft>
+            </a:pPr>
+            <a:r>
+              <a:rPr sz="1500">
+                <a:solidFill>
+                  <a:srgbClr val="22282E"/>
+                </a:solidFill>
+              </a:rPr>
+              <a:t>•  ATT&amp;CK Navigator para la capa de cobertura del informe.</a:t>
+            </a:r>
+          </a:p>
+          <a:p>
+            <a:pPr>
+              <a:spcAft>
+                <a:spcPts val="600"/>
+              </a:spcAft>
+            </a:pPr>
+            <a:r>
+              <a:rPr sz="1500">
+                <a:solidFill>
+                  <a:srgbClr val="22282E"/>
+                </a:solidFill>
+              </a:rPr>
+              <a:t>•  Plantilla de informe (executive summary + narrativa + hallazgos + recomendaciones + apéndice técnico).</a:t>
+            </a:r>
+          </a:p>
+          <a:p>
+            <a:pPr>
+              <a:spcAft>
+                <a:spcPts val="600"/>
+              </a:spcAft>
+            </a:pPr>
+            <a:r>
+              <a:rPr sz="1500">
+                <a:solidFill>
+                  <a:srgbClr val="22282E"/>
+                </a:solidFill>
+              </a:rPr>
+              <a:t>•  Datos de detección del ciclo purple (Clase 178) para las métricas.</a:t>
             </a:r>
           </a:p>
         </p:txBody>
@@ -4718,7 +5094,7 @@
                   <a:srgbClr val="0B3D2E"/>
                 </a:solidFill>
               </a:rPr>
-              <a:t>📝 Reto verificable</a:t>
+              <a:t>🧪 Laboratorio guiado (ejercicio aplicado)</a:t>
             </a:r>
           </a:p>
         </p:txBody>
@@ -4756,22 +5132,97 @@
                   <a:srgbClr val="22282E"/>
                 </a:solidFill>
               </a:rPr>
-              <a:t>•  Produce un informe de Red Team completo de tu ejercicio en el AD lab: resumen ejecutivo, narrativa del attack path con mapeo ATT&amp;CK, tabla de hallazgos, métricas (TTD/TTR/dwell/cobertura) y recomendaciones priorizadas.</a:t>
-            </a:r>
-          </a:p>
-          <a:p>
-            <a:pPr>
-              <a:spcAft>
-                <a:spcPts val="600"/>
-              </a:spcAft>
-            </a:pPr>
-            <a:r>
-              <a:rPr sz="1500">
-                <a:solidFill>
-                  <a:srgbClr val="22282E"/>
-                </a:solidFill>
-              </a:rPr>
-              <a:t>•  Criterio de aceptación: el informe permite a un ejecutivo entender el riesgo en la primera página y a un ingeniero reproducir y remediar cada hallazgo desde el detalle técnico; las métricas están respaldadas por timestamps reales del cuaderno y hay una capa de cobertura en Navigator adjunta.</a:t>
+              <a:t>•  Reúne el material. Toma el cuaderno de la operación en tu AD lab (foothold → AD → DA) con timestamps y capturas.</a:t>
+            </a:r>
+          </a:p>
+          <a:p>
+            <a:pPr>
+              <a:spcAft>
+                <a:spcPts val="600"/>
+              </a:spcAft>
+            </a:pPr>
+            <a:r>
+              <a:rPr sz="1500">
+                <a:solidFill>
+                  <a:srgbClr val="22282E"/>
+                </a:solidFill>
+              </a:rPr>
+              <a:t>•  Redacta el resumen ejecutivo. Media página: objetivo, si se alcanzó, riesgo de negocio y 3 recomendaciones clave, sin jerga.</a:t>
+            </a:r>
+          </a:p>
+          <a:p>
+            <a:pPr>
+              <a:spcAft>
+                <a:spcPts val="600"/>
+              </a:spcAft>
+            </a:pPr>
+            <a:r>
+              <a:rPr sz="1500">
+                <a:solidFill>
+                  <a:srgbClr val="22282E"/>
+                </a:solidFill>
+              </a:rPr>
+              <a:t>•  Escribe la narrativa. Cuenta el attack path en orden, cada paso con: acción, evidencia, ID ATT&amp;CK y si fue detectado.</a:t>
+            </a:r>
+          </a:p>
+          <a:p>
+            <a:pPr>
+              <a:spcAft>
+                <a:spcPts val="600"/>
+              </a:spcAft>
+            </a:pPr>
+            <a:r>
+              <a:rPr sz="1500">
+                <a:solidFill>
+                  <a:srgbClr val="22282E"/>
+                </a:solidFill>
+              </a:rPr>
+              <a:t>•  Construye la tabla de hallazgos. Cada hallazgo con severidad, impacto, técnica ATT&amp;CK y recomendación priorizada.</a:t>
+            </a:r>
+          </a:p>
+          <a:p>
+            <a:pPr>
+              <a:spcAft>
+                <a:spcPts val="600"/>
+              </a:spcAft>
+            </a:pPr>
+            <a:r>
+              <a:rPr sz="1500">
+                <a:solidFill>
+                  <a:srgbClr val="22282E"/>
+                </a:solidFill>
+              </a:rPr>
+              <a:t>•  Calcula métricas. Para cada fase, deriva TTD y TTR a partir de los timestamps del cuaderno y los datos del SOC; estima el dwell time global.</a:t>
+            </a:r>
+          </a:p>
+          <a:p>
+            <a:pPr>
+              <a:spcAft>
+                <a:spcPts val="600"/>
+              </a:spcAft>
+            </a:pPr>
+            <a:r>
+              <a:rPr sz="1500">
+                <a:solidFill>
+                  <a:srgbClr val="22282E"/>
+                </a:solidFill>
+              </a:rPr>
+              <a:t>•  Genera la capa de cobertura. En Navigator, marca en verde/rojo las técnicas detectadas/no detectadas y expórtala como anexo.</a:t>
+            </a:r>
+          </a:p>
+          <a:p>
+            <a:pPr>
+              <a:spcAft>
+                <a:spcPts val="600"/>
+              </a:spcAft>
+            </a:pPr>
+            <a:r>
+              <a:rPr sz="1500">
+                <a:solidFill>
+                  <a:srgbClr val="22282E"/>
+                </a:solidFill>
+              </a:rPr>
+              <a:t>•  Prioriza recomendaciones. Ordénalas en una matriz impacto/esfuerzo para que el cliente sepa por dónde empezar.</a:t>
             </a:r>
           </a:p>
         </p:txBody>
